--- a/Courses/Computer-Modeling-and-IT/Computer-Modeling-and-IT-6-Class/31-Libraries/31-Libraries.pptx
+++ b/Courses/Computer-Modeling-and-IT/Computer-Modeling-and-IT-6-Class/31-Libraries/31-Libraries.pptx
@@ -285,7 +285,7 @@
           <a:p>
             <a:fld id="{4E087215-0C8F-4762-A664-737A353EC9A4}" type="datetimeFigureOut">
               <a:rPr lang="bg-BG" smtClean="0"/>
-              <a:t>6.12.2024 г.</a:t>
+              <a:t>25.9.2026 г.</a:t>
             </a:fld>
             <a:endParaRPr lang="bg-BG"/>
           </a:p>
@@ -481,7 +481,7 @@
           <a:p>
             <a:fld id="{72D84649-876A-46C9-8472-14CB09C070D8}" type="datetimeFigureOut">
               <a:rPr lang="en-US" smtClean="0"/>
-              <a:t>12/6/2024</a:t>
+              <a:t>9/25/2026</a:t>
             </a:fld>
             <a:endParaRPr lang="en-US" dirty="0"/>
           </a:p>
@@ -6980,14 +6980,13 @@
               </a:ext>
             </a:extLst>
           </a:blip>
-          <a:stretch>
-            <a:fillRect/>
-          </a:stretch>
+          <a:srcRect/>
+          <a:stretch/>
         </p:blipFill>
         <p:spPr>
           <a:xfrm>
-            <a:off x="525302" y="3204000"/>
-            <a:ext cx="1902125" cy="853099"/>
+            <a:off x="525302" y="3204321"/>
+            <a:ext cx="1902125" cy="852457"/>
           </a:xfrm>
           <a:prstGeom prst="rect">
             <a:avLst/>
@@ -11212,11 +11211,11 @@
   <p:clrMapOvr>
     <a:masterClrMapping/>
   </p:clrMapOvr>
-  <mc:AlternateContent xmlns:mc="http://schemas.openxmlformats.org/markup-compatibility/2006">
-    <mc:Choice xmlns:p14="http://schemas.microsoft.com/office/powerpoint/2010/main" Requires="p14">
+  <mc:AlternateContent xmlns:mc="http://schemas.openxmlformats.org/markup-compatibility/2006" xmlns:p14="http://schemas.microsoft.com/office/powerpoint/2010/main">
+    <mc:Choice Requires="p14">
       <p:transition spd="slow" p14:dur="2000" advClick="0" advTm="5000"/>
     </mc:Choice>
-    <mc:Fallback>
+    <mc:Fallback xmlns="">
       <p:transition spd="slow" advClick="0" advTm="5000"/>
     </mc:Fallback>
   </mc:AlternateContent>
@@ -12099,11 +12098,11 @@
   <p:clrMapOvr>
     <a:masterClrMapping/>
   </p:clrMapOvr>
-  <mc:AlternateContent xmlns:mc="http://schemas.openxmlformats.org/markup-compatibility/2006">
-    <mc:Choice xmlns:p14="http://schemas.microsoft.com/office/powerpoint/2010/main" Requires="p14">
+  <mc:AlternateContent xmlns:mc="http://schemas.openxmlformats.org/markup-compatibility/2006" xmlns:p14="http://schemas.microsoft.com/office/powerpoint/2010/main">
+    <mc:Choice Requires="p14">
       <p:transition spd="slow" p14:dur="2000" advClick="0" advTm="5000"/>
     </mc:Choice>
-    <mc:Fallback>
+    <mc:Fallback xmlns="">
       <p:transition spd="slow" advClick="0" advTm="5000"/>
     </mc:Fallback>
   </mc:AlternateContent>
